--- a/assets/ppts/M2.3_Linux_Kernel_TCP_IP_Routing.pptx
+++ b/assets/ppts/M2.3_Linux_Kernel_TCP_IP_Routing.pptx
@@ -8,6 +8,7 @@
     <p:sldId id="256" r:id="rId7"/>
     <p:sldId id="257" r:id="rId8"/>
     <p:sldId id="258" r:id="rId9"/>
+    <p:sldId id="259" r:id="rId10"/>
   </p:sldIdLst>
   <p:sldSz cx="12191695" cy="6858000" type="screen4x3"/>
   <p:notesSz cx="6858000" cy="9144000"/>
@@ -3141,8 +3142,8 @@
         </p:nvSpPr>
         <p:spPr>
           <a:xfrm>
-            <a:off x="822960" y="1188720"/>
-            <a:ext cx="164592" cy="4480560"/>
+            <a:off x="0" y="0"/>
+            <a:ext cx="12191695" cy="137160"/>
           </a:xfrm>
           <a:prstGeom prst="rect">
             <a:avLst/>
@@ -3178,14 +3179,57 @@
       </p:sp>
       <p:sp>
         <p:nvSpPr>
-          <p:cNvPr id="4" name="TextBox 3"/>
+          <p:cNvPr id="4" name="Rectangle 3"/>
+          <p:cNvSpPr/>
+          <p:nvPr/>
+        </p:nvSpPr>
+        <p:spPr>
+          <a:xfrm>
+            <a:off x="822960" y="1097280"/>
+            <a:ext cx="164592" cy="4663440"/>
+          </a:xfrm>
+          <a:prstGeom prst="rect">
+            <a:avLst/>
+          </a:prstGeom>
+          <a:solidFill>
+            <a:srgbClr val="D97706"/>
+          </a:solidFill>
+          <a:ln>
+            <a:noFill/>
+          </a:ln>
+        </p:spPr>
+        <p:style>
+          <a:lnRef idx="1">
+            <a:schemeClr val="accent1"/>
+          </a:lnRef>
+          <a:fillRef idx="3">
+            <a:schemeClr val="accent1"/>
+          </a:fillRef>
+          <a:effectRef idx="2">
+            <a:schemeClr val="accent1"/>
+          </a:effectRef>
+          <a:fontRef idx="minor">
+            <a:schemeClr val="lt1"/>
+          </a:fontRef>
+        </p:style>
+        <p:txBody>
+          <a:bodyPr rtlCol="0" anchor="ctr"/>
+          <a:lstStyle/>
+          <a:p>
+            <a:pPr algn="ctr"/>
+          </a:p>
+        </p:txBody>
+      </p:sp>
+      <p:sp>
+        <p:nvSpPr>
+          <p:cNvPr id="5" name="TextBox 4"/>
           <p:cNvSpPr txBox="1"/>
           <p:nvPr/>
         </p:nvSpPr>
         <p:spPr>
           <a:xfrm>
-            <a:off x="1280160" y="1097280"/>
-            <a:ext cx="10058400" cy="4663440"/>
+            <a:off x="1234440" y="1005840"/>
+            <a:ext cx="10241280" cy="4846320"/>
           </a:xfrm>
           <a:prstGeom prst="rect">
             <a:avLst/>
@@ -3200,70 +3244,165 @@
           <a:p>
             <a:pPr>
               <a:spcAft>
+                <a:spcPts val="1000"/>
+              </a:spcAft>
+              <a:defRPr b="1" sz="1300">
+                <a:solidFill>
+                  <a:srgbClr val="D97706"/>
+                </a:solidFill>
+              </a:defRPr>
+            </a:pPr>
+            <a:r>
+              <a:t>PCCST501 Computer Networks | KTU 2024 Scheme • MODULE 2 • M2.3</a:t>
+            </a:r>
+          </a:p>
+          <a:p>
+            <a:pPr>
+              <a:spcAft>
                 <a:spcPts val="1200"/>
               </a:spcAft>
-              <a:defRPr b="1" sz="1300">
-                <a:solidFill>
-                  <a:srgbClr val="D97706"/>
+              <a:defRPr b="1" sz="3000">
+                <a:solidFill>
+                  <a:srgbClr val="F8FAFC"/>
                 </a:solidFill>
               </a:defRPr>
             </a:pPr>
             <a:r>
-              <a:t>PCCST501 Computer Networks | KTU 2024 Scheme • MODULE 2 • M2.3</a:t>
+              <a:t>Linux Kernel TCP/IP Stack &amp; Routing Implementation</a:t>
             </a:r>
           </a:p>
           <a:p>
             <a:pPr>
               <a:spcAft>
-                <a:spcPts val="1400"/>
+                <a:spcPts val="2400"/>
               </a:spcAft>
-              <a:defRPr b="1" sz="3200">
-                <a:solidFill>
-                  <a:srgbClr val="F8FAFC"/>
+              <a:defRPr sz="1600">
+                <a:solidFill>
+                  <a:srgbClr val="94A3B8"/>
                 </a:solidFill>
               </a:defRPr>
             </a:pPr>
             <a:r>
-              <a:t>Linux Kernel TCP/IP Architecture &amp; Routing</a:t>
+              <a:t>Linux Network Packet Flow, sk_buff Data Structure, net_device, Forwarding Information Base (FIB), Route Cache, Linux iproute2</a:t>
             </a:r>
           </a:p>
           <a:p>
             <a:pPr>
               <a:spcAft>
-                <a:spcPts val="2800"/>
+                <a:spcPts val="300"/>
               </a:spcAft>
-              <a:defRPr sz="1700">
+              <a:defRPr b="1" sz="1350">
+                <a:solidFill>
+                  <a:srgbClr val="E2E8F0"/>
+                </a:solidFill>
+              </a:defRPr>
+            </a:pPr>
+            <a:r>
+              <a:t>Prepared by: Prof. Anju Markose | Assistant Professor, Dept. of CSE | VJCET</a:t>
+            </a:r>
+          </a:p>
+          <a:p>
+            <a:pPr>
+              <a:defRPr sz="1150">
                 <a:solidFill>
                   <a:srgbClr val="94A3B8"/>
                 </a:solidFill>
               </a:defRPr>
             </a:pPr>
             <a:r>
-              <a:t>Linux Network Stack Internals, sk_buff Structure, Routing Table fib_table, Route Cache &amp; ip route Commands</a:t>
-            </a:r>
-          </a:p>
+              <a:t>Viswajyothi College of Engineering and Technology (VJCET), Vazhakulam • KTU S5 CSE</a:t>
+            </a:r>
+          </a:p>
+        </p:txBody>
+      </p:sp>
+      <p:sp>
+        <p:nvSpPr>
+          <p:cNvPr id="6" name="Rounded Rectangle 5"/>
+          <p:cNvSpPr/>
+          <p:nvPr/>
+        </p:nvSpPr>
+        <p:spPr>
+          <a:xfrm>
+            <a:off x="8412480" y="5120640"/>
+            <a:ext cx="3017520" cy="822960"/>
+          </a:xfrm>
+          <a:prstGeom prst="roundRect">
+            <a:avLst/>
+          </a:prstGeom>
+          <a:solidFill>
+            <a:srgbClr val="1E293B"/>
+          </a:solidFill>
+          <a:ln w="12700">
+            <a:solidFill>
+              <a:srgbClr val="0E7490"/>
+            </a:solidFill>
+          </a:ln>
+        </p:spPr>
+        <p:style>
+          <a:lnRef idx="1">
+            <a:schemeClr val="accent1"/>
+          </a:lnRef>
+          <a:fillRef idx="3">
+            <a:schemeClr val="accent1"/>
+          </a:fillRef>
+          <a:effectRef idx="2">
+            <a:schemeClr val="accent1"/>
+          </a:effectRef>
+          <a:fontRef idx="minor">
+            <a:schemeClr val="lt1"/>
+          </a:fontRef>
+        </p:style>
+        <p:txBody>
+          <a:bodyPr rtlCol="0" anchor="ctr"/>
+          <a:lstStyle/>
+          <a:p>
+            <a:pPr algn="ctr"/>
+          </a:p>
+        </p:txBody>
+      </p:sp>
+      <p:sp>
+        <p:nvSpPr>
+          <p:cNvPr id="7" name="TextBox 6"/>
+          <p:cNvSpPr txBox="1"/>
+          <p:nvPr/>
+        </p:nvSpPr>
+        <p:spPr>
+          <a:xfrm>
+            <a:off x="8503920" y="5166360"/>
+            <a:ext cx="2834640" cy="731520"/>
+          </a:xfrm>
+          <a:prstGeom prst="rect">
+            <a:avLst/>
+          </a:prstGeom>
+          <a:noFill/>
+        </p:spPr>
+        <p:txBody>
+          <a:bodyPr wrap="none">
+            <a:spAutoFit/>
+          </a:bodyPr>
+          <a:lstStyle/>
           <a:p>
             <a:pPr>
-              <a:defRPr b="1" sz="1300">
-                <a:solidFill>
-                  <a:srgbClr val="E2E8F0"/>
+              <a:defRPr b="1" sz="1050">
+                <a:solidFill>
+                  <a:srgbClr val="D97706"/>
                 </a:solidFill>
               </a:defRPr>
             </a:pPr>
             <a:r>
-              <a:t>Prepared by: Prof. Anju Markose | Assistant Professor, Dept. of CSE | VJCET</a:t>
+              <a:t>KTU B.Tech Curriculum</a:t>
             </a:r>
           </a:p>
           <a:p>
             <a:pPr>
-              <a:defRPr sz="1100">
-                <a:solidFill>
-                  <a:srgbClr val="94A3B8"/>
+              <a:defRPr sz="950">
+                <a:solidFill>
+                  <a:srgbClr val="F8FAFC"/>
                 </a:solidFill>
               </a:defRPr>
             </a:pPr>
             <a:r>
-              <a:t>Viswajyothi College of Engineering and Technology (VJCET), Vazhakulam</a:t>
+              <a:t>Official Classroom Slide Deck</a:t>
             </a:r>
           </a:p>
         </p:txBody>
@@ -3395,14 +3534,14 @@
           <a:lstStyle/>
           <a:p>
             <a:pPr>
-              <a:defRPr b="1" sz="2300">
+              <a:defRPr b="1" sz="2200">
                 <a:solidFill>
                   <a:srgbClr val="F8FAFC"/>
                 </a:solidFill>
               </a:defRPr>
             </a:pPr>
             <a:r>
-              <a:t>2.3.1 Linux Kernel Network Stack &amp; sk_buff</a:t>
+              <a:t>2.3.1 Linux Kernel Network Subsystem Architecture</a:t>
             </a:r>
           </a:p>
         </p:txBody>
@@ -3450,7 +3589,7 @@
         </p:nvSpPr>
         <p:spPr>
           <a:xfrm>
-            <a:off x="731520" y="1280160"/>
+            <a:off x="731520" y="1234440"/>
             <a:ext cx="6858000" cy="4937760"/>
           </a:xfrm>
           <a:prstGeom prst="rect">
@@ -3468,29 +3607,29 @@
               <a:spcAft>
                 <a:spcPts val="200"/>
               </a:spcAft>
-              <a:defRPr b="1" sz="1500">
+              <a:defRPr b="1" sz="1450">
                 <a:solidFill>
                   <a:srgbClr val="0F1E4A"/>
                 </a:solidFill>
               </a:defRPr>
             </a:pPr>
             <a:r>
-              <a:t>• Linux Packet Journey</a:t>
+              <a:t>• The `sk_buff` (Socket Buffer) Structure</a:t>
             </a:r>
           </a:p>
           <a:p>
             <a:pPr>
               <a:spcAft>
-                <a:spcPts val="800"/>
+                <a:spcPts val="700"/>
               </a:spcAft>
-              <a:defRPr sz="1300">
-                <a:solidFill>
-                  <a:srgbClr val="1E293B"/>
+              <a:defRPr sz="1250">
+                <a:solidFill>
+                  <a:srgbClr val="0F172A"/>
                 </a:solidFill>
               </a:defRPr>
             </a:pPr>
             <a:r>
-              <a:t>   NIC RX Ring Buffer $\to$ DMA to RAM $\to$ Hard IRQ $\to$ NAPI SoftIRQ $\to$ `netif_receive_skb()` $\to$ IP Layer $\to$ Transport Layer $\to$ Socket Receive Queue.</a:t>
+              <a:t>   The universal data structure representing network packets in Linux. Contains pointers: `head`, `data`, `tail`, `end`. Allows zero-copy header prepending/stripping across layers simply by moving the `data` pointer.</a:t>
             </a:r>
           </a:p>
           <a:p>
@@ -3498,29 +3637,29 @@
               <a:spcAft>
                 <a:spcPts val="200"/>
               </a:spcAft>
-              <a:defRPr b="1" sz="1500">
+              <a:defRPr b="1" sz="1450">
                 <a:solidFill>
                   <a:srgbClr val="0F1E4A"/>
                 </a:solidFill>
               </a:defRPr>
             </a:pPr>
             <a:r>
-              <a:t>• Socket Buffer (`struct sk_buff`)</a:t>
+              <a:t>• Packet Ingress Flow (RX)</a:t>
             </a:r>
           </a:p>
           <a:p>
             <a:pPr>
               <a:spcAft>
-                <a:spcPts val="800"/>
+                <a:spcPts val="700"/>
               </a:spcAft>
-              <a:defRPr sz="1300">
-                <a:solidFill>
-                  <a:srgbClr val="1E293B"/>
+              <a:defRPr sz="1250">
+                <a:solidFill>
+                  <a:srgbClr val="0F172A"/>
                 </a:solidFill>
               </a:defRPr>
             </a:pPr>
             <a:r>
-              <a:t>   The central data structure in Linux kernel networking representing a network packet as it moves through layers.</a:t>
+              <a:t>   NIC receives frame -&gt; DMA transfer to Ring Buffer -&gt; Triggers Hard IRQ -&gt; NAPI poll scheduled (SoftIRQ `NET_RX_SOFTIRQ`) -&gt; `netif_receive_skb()` -&gt; L3 `ip_rcv()` -&gt; L4 `tcp_v4_rcv()` -&gt; Socket receive queue -&gt; `read()`.</a:t>
             </a:r>
           </a:p>
           <a:p>
@@ -3528,29 +3667,29 @@
               <a:spcAft>
                 <a:spcPts val="200"/>
               </a:spcAft>
-              <a:defRPr b="1" sz="1500">
+              <a:defRPr b="1" sz="1450">
                 <a:solidFill>
                   <a:srgbClr val="0F1E4A"/>
                 </a:solidFill>
               </a:defRPr>
             </a:pPr>
             <a:r>
-              <a:t>• Zero-Copy Pointer Manipulation</a:t>
+              <a:t>• Packet Egress Flow (TX)</a:t>
             </a:r>
           </a:p>
           <a:p>
             <a:pPr>
               <a:spcAft>
-                <a:spcPts val="800"/>
+                <a:spcPts val="700"/>
               </a:spcAft>
-              <a:defRPr sz="1300">
-                <a:solidFill>
-                  <a:srgbClr val="1E293B"/>
+              <a:defRPr sz="1250">
+                <a:solidFill>
+                  <a:srgbClr val="0F172A"/>
                 </a:solidFill>
               </a:defRPr>
             </a:pPr>
             <a:r>
-              <a:t>   `sk_buff` contains `head`, `data`, `tail`, `end` pointers. Adding headers (encapsulation) simply shifts `data` pointer via `skb_push()`, avoiding expensive data copying in memory!</a:t>
+              <a:t>   App calls `write()` -&gt; L4 `tcp_sendmsg()` creates `sk_buff` -&gt; L3 `ip_queue_xmit()` routes packet -&gt; L2 `dev_queue_xmit()` enqueues to `qdisc` -&gt; NIC DMA transmit -&gt; Hardware TX IRQ.</a:t>
             </a:r>
           </a:p>
           <a:p>
@@ -3558,29 +3697,59 @@
               <a:spcAft>
                 <a:spcPts val="200"/>
               </a:spcAft>
-              <a:defRPr b="1" sz="1500">
+              <a:defRPr b="1" sz="1450">
                 <a:solidFill>
                   <a:srgbClr val="0F1E4A"/>
                 </a:solidFill>
               </a:defRPr>
             </a:pPr>
             <a:r>
-              <a:t>• Netfilter Hook Framework</a:t>
+              <a:t>• Forwarding Information Base (FIB)</a:t>
             </a:r>
           </a:p>
           <a:p>
             <a:pPr>
               <a:spcAft>
-                <a:spcPts val="800"/>
+                <a:spcPts val="700"/>
               </a:spcAft>
-              <a:defRPr sz="1300">
-                <a:solidFill>
-                  <a:srgbClr val="1E293B"/>
+              <a:defRPr sz="1250">
+                <a:solidFill>
+                  <a:srgbClr val="0F172A"/>
                 </a:solidFill>
               </a:defRPr>
             </a:pPr>
             <a:r>
-              <a:t>   Kernel hooks (`NF_INET_PRE_ROUTING`, `NF_INET_LOCAL_IN`, `NF_INET_FORWARD`, `NF_INET_LOCAL_OUT`, `NF_INET_POST_ROUTING`) powering `iptables` / `nftables` firewalls and NAT.</a:t>
+              <a:t>   The core kernel routing table in Linux organized as a fast LC-trie (Level-Compressed Trie) supporting sub-microsecond Longest Prefix Matching.</a:t>
+            </a:r>
+          </a:p>
+          <a:p>
+            <a:pPr>
+              <a:spcAft>
+                <a:spcPts val="200"/>
+              </a:spcAft>
+              <a:defRPr b="1" sz="1450">
+                <a:solidFill>
+                  <a:srgbClr val="0F1E4A"/>
+                </a:solidFill>
+              </a:defRPr>
+            </a:pPr>
+            <a:r>
+              <a:t>• Policy-Based Routing (PBR)</a:t>
+            </a:r>
+          </a:p>
+          <a:p>
+            <a:pPr>
+              <a:spcAft>
+                <a:spcPts val="700"/>
+              </a:spcAft>
+              <a:defRPr sz="1250">
+                <a:solidFill>
+                  <a:srgbClr val="0F172A"/>
+                </a:solidFill>
+              </a:defRPr>
+            </a:pPr>
+            <a:r>
+              <a:t>   Linux supports multiple routing tables selected via `ip rule` based on source IP, TOS, fwmark, or incoming interface.</a:t>
             </a:r>
           </a:p>
         </p:txBody>
@@ -3593,14 +3762,14 @@
         </p:nvSpPr>
         <p:spPr>
           <a:xfrm>
-            <a:off x="7955279" y="1280160"/>
-            <a:ext cx="3566160" cy="4846320"/>
+            <a:off x="7955279" y="1234440"/>
+            <a:ext cx="3566160" cy="4892040"/>
           </a:xfrm>
           <a:prstGeom prst="roundRect">
             <a:avLst/>
           </a:prstGeom>
           <a:solidFill>
-            <a:srgbClr val="F1F5F9"/>
+            <a:srgbClr val="F8FAFC"/>
           </a:solidFill>
           <a:ln w="19050">
             <a:solidFill>
@@ -3638,7 +3807,7 @@
         </p:nvSpPr>
         <p:spPr>
           <a:xfrm>
-            <a:off x="8138160" y="1417320"/>
+            <a:off x="8138160" y="1371600"/>
             <a:ext cx="3200400" cy="4572000"/>
           </a:xfrm>
           <a:prstGeom prst="rect">
@@ -3663,7 +3832,7 @@
               </a:defRPr>
             </a:pPr>
             <a:r>
-              <a:t>sk_buff Functions</a:t>
+              <a:t>Kernel Data Structures</a:t>
             </a:r>
           </a:p>
           <a:p>
@@ -3673,12 +3842,12 @@
               </a:spcAft>
               <a:defRPr sz="1200">
                 <a:solidFill>
-                  <a:srgbClr val="1E293B"/>
+                  <a:srgbClr val="0F172A"/>
                 </a:solidFill>
               </a:defRPr>
             </a:pPr>
             <a:r>
-              <a:t>→ skb_push(): Prepend header space</a:t>
+              <a:t>→ sk_buff: Packet descriptor</a:t>
             </a:r>
           </a:p>
           <a:p>
@@ -3688,12 +3857,12 @@
               </a:spcAft>
               <a:defRPr sz="1200">
                 <a:solidFill>
-                  <a:srgbClr val="1E293B"/>
+                  <a:srgbClr val="0F172A"/>
                 </a:solidFill>
               </a:defRPr>
             </a:pPr>
             <a:r>
-              <a:t>→ skb_pull(): Strip header at receiver</a:t>
+              <a:t>→ net_device: Hardware NIC abstraction</a:t>
             </a:r>
           </a:p>
           <a:p>
@@ -3703,12 +3872,12 @@
               </a:spcAft>
               <a:defRPr sz="1200">
                 <a:solidFill>
-                  <a:srgbClr val="1E293B"/>
+                  <a:srgbClr val="0F172A"/>
                 </a:solidFill>
               </a:defRPr>
             </a:pPr>
             <a:r>
-              <a:t>→ skb_put(): Append payload data</a:t>
+              <a:t>→ FIB: Kernel routing table trie</a:t>
             </a:r>
           </a:p>
           <a:p>
@@ -3718,12 +3887,12 @@
               </a:spcAft>
               <a:defRPr sz="1200">
                 <a:solidFill>
-                  <a:srgbClr val="1E293B"/>
+                  <a:srgbClr val="0F172A"/>
                 </a:solidFill>
               </a:defRPr>
             </a:pPr>
             <a:r>
-              <a:t>→ skb_reserve(): Allocate head room</a:t>
+              <a:t>→ qdisc: Traffic queuing discipline</a:t>
             </a:r>
           </a:p>
           <a:p>
@@ -3733,12 +3902,12 @@
               </a:spcAft>
               <a:defRPr sz="1200">
                 <a:solidFill>
-                  <a:srgbClr val="1E293B"/>
+                  <a:srgbClr val="0F172A"/>
                 </a:solidFill>
               </a:defRPr>
             </a:pPr>
             <a:r>
-              <a:t>→ Zero memory copy overhead!</a:t>
+              <a:t>→ NAPI: Interrupt mitigation polling</a:t>
             </a:r>
           </a:p>
         </p:txBody>
@@ -3751,8 +3920,8 @@
         </p:nvSpPr>
         <p:spPr>
           <a:xfrm>
-            <a:off x="731520" y="6309360"/>
-            <a:ext cx="10789920" cy="365760"/>
+            <a:off x="731520" y="6327648"/>
+            <a:ext cx="10789920" cy="320040"/>
           </a:xfrm>
           <a:prstGeom prst="rect">
             <a:avLst/>
@@ -3774,6 +3943,41 @@
             </a:pPr>
             <a:r>
               <a:t>PCCST501 Computer Networks | KTU 2024 Scheme | Prof. Anju Markose | Assistant Professor, Dept. of CSE | VJCET</a:t>
+            </a:r>
+          </a:p>
+        </p:txBody>
+      </p:sp>
+      <p:sp>
+        <p:nvSpPr>
+          <p:cNvPr id="10" name="TextBox 9"/>
+          <p:cNvSpPr txBox="1"/>
+          <p:nvPr/>
+        </p:nvSpPr>
+        <p:spPr>
+          <a:xfrm>
+            <a:off x="6858000" y="6327648"/>
+            <a:ext cx="4572000" cy="320040"/>
+          </a:xfrm>
+          <a:prstGeom prst="rect">
+            <a:avLst/>
+          </a:prstGeom>
+          <a:noFill/>
+        </p:spPr>
+        <p:txBody>
+          <a:bodyPr wrap="none">
+            <a:spAutoFit/>
+          </a:bodyPr>
+          <a:lstStyle/>
+          <a:p>
+            <a:pPr algn="r">
+              <a:defRPr sz="950">
+                <a:solidFill>
+                  <a:srgbClr val="64748B"/>
+                </a:solidFill>
+              </a:defRPr>
+            </a:pPr>
+            <a:r>
+              <a:t>Dept. of CSE, VJCET</a:t>
             </a:r>
           </a:p>
         </p:txBody>
@@ -3905,14 +4109,14 @@
           <a:lstStyle/>
           <a:p>
             <a:pPr>
-              <a:defRPr b="1" sz="2300">
+              <a:defRPr b="1" sz="2200">
                 <a:solidFill>
                   <a:srgbClr val="F8FAFC"/>
                 </a:solidFill>
               </a:defRPr>
             </a:pPr>
             <a:r>
-              <a:t>2.3.2 Linux Routing Table (fib_table) &amp; ip route CLI</a:t>
+              <a:t>2.3.2 Hands-On: Linux Kernel Routing with `iproute2`</a:t>
             </a:r>
           </a:p>
         </p:txBody>
@@ -3947,230 +4151,27 @@
               </a:defRPr>
             </a:pPr>
             <a:r>
-              <a:t>M2.3 LINUX ROUTING COMMANDS</a:t>
-            </a:r>
-          </a:p>
-        </p:txBody>
-      </p:sp>
-      <p:sp>
-        <p:nvSpPr>
-          <p:cNvPr id="6" name="TextBox 5"/>
-          <p:cNvSpPr txBox="1"/>
-          <p:nvPr/>
-        </p:nvSpPr>
-        <p:spPr>
-          <a:xfrm>
-            <a:off x="731520" y="1280160"/>
-            <a:ext cx="6858000" cy="4937760"/>
-          </a:xfrm>
-          <a:prstGeom prst="rect">
-            <a:avLst/>
-          </a:prstGeom>
-          <a:noFill/>
-        </p:spPr>
-        <p:txBody>
-          <a:bodyPr wrap="square">
-            <a:spAutoFit/>
-          </a:bodyPr>
-          <a:lstStyle/>
-          <a:p>
-            <a:pPr>
-              <a:spcAft>
-                <a:spcPts val="200"/>
-              </a:spcAft>
-              <a:defRPr b="1" sz="1500">
-                <a:solidFill>
-                  <a:srgbClr val="0F1E4A"/>
-                </a:solidFill>
-              </a:defRPr>
-            </a:pPr>
-            <a:r>
-              <a:t>• Forwarding Information Base (`fib_table`)</a:t>
-            </a:r>
-          </a:p>
-          <a:p>
-            <a:pPr>
-              <a:spcAft>
-                <a:spcPts val="800"/>
-              </a:spcAft>
-              <a:defRPr sz="1300">
-                <a:solidFill>
-                  <a:srgbClr val="1E293B"/>
-                </a:solidFill>
-              </a:defRPr>
-            </a:pPr>
-            <a:r>
-              <a:t>   Linux kernel routing table storing network prefixes, metrics, scopes, and next-hop gateways organized in a LC-trie (Level-Compressed Trie) for sub-microsecond Longest Prefix Matching.</a:t>
-            </a:r>
-          </a:p>
-          <a:p>
-            <a:pPr>
-              <a:spcAft>
-                <a:spcPts val="200"/>
-              </a:spcAft>
-              <a:defRPr b="1" sz="1500">
-                <a:solidFill>
-                  <a:srgbClr val="0F1E4A"/>
-                </a:solidFill>
-              </a:defRPr>
-            </a:pPr>
-            <a:r>
-              <a:t>• Viewing Routing Table</a:t>
-            </a:r>
-          </a:p>
-          <a:p>
-            <a:pPr>
-              <a:spcAft>
-                <a:spcPts val="800"/>
-              </a:spcAft>
-              <a:defRPr sz="1300">
-                <a:solidFill>
-                  <a:srgbClr val="1E293B"/>
-                </a:solidFill>
-              </a:defRPr>
-            </a:pPr>
-            <a:r>
-              <a:t>   `ip route show` or `ip route list` displays main routing table entries.</a:t>
-            </a:r>
-          </a:p>
-          <a:p>
-            <a:pPr>
-              <a:spcAft>
-                <a:spcPts val="200"/>
-              </a:spcAft>
-              <a:defRPr b="1" sz="1500">
-                <a:solidFill>
-                  <a:srgbClr val="0F1E4A"/>
-                </a:solidFill>
-              </a:defRPr>
-            </a:pPr>
-            <a:r>
-              <a:t>• Adding Static Route</a:t>
-            </a:r>
-          </a:p>
-          <a:p>
-            <a:pPr>
-              <a:spcAft>
-                <a:spcPts val="800"/>
-              </a:spcAft>
-              <a:defRPr sz="1300">
-                <a:solidFill>
-                  <a:srgbClr val="1E293B"/>
-                </a:solidFill>
-              </a:defRPr>
-            </a:pPr>
-            <a:r>
-              <a:t>   `ip route add 192.168.10.0/24 via 10.0.0.1 dev eth0`.</a:t>
-            </a:r>
-          </a:p>
-          <a:p>
-            <a:pPr>
-              <a:spcAft>
-                <a:spcPts val="200"/>
-              </a:spcAft>
-              <a:defRPr b="1" sz="1500">
-                <a:solidFill>
-                  <a:srgbClr val="0F1E4A"/>
-                </a:solidFill>
-              </a:defRPr>
-            </a:pPr>
-            <a:r>
-              <a:t>• Adding Default Gateway</a:t>
-            </a:r>
-          </a:p>
-          <a:p>
-            <a:pPr>
-              <a:spcAft>
-                <a:spcPts val="800"/>
-              </a:spcAft>
-              <a:defRPr sz="1300">
-                <a:solidFill>
-                  <a:srgbClr val="1E293B"/>
-                </a:solidFill>
-              </a:defRPr>
-            </a:pPr>
-            <a:r>
-              <a:t>   `ip route add default via 192.168.1.1 dev eth0`.</a:t>
-            </a:r>
-          </a:p>
-          <a:p>
-            <a:pPr>
-              <a:spcAft>
-                <a:spcPts val="200"/>
-              </a:spcAft>
-              <a:defRPr b="1" sz="1500">
-                <a:solidFill>
-                  <a:srgbClr val="0F1E4A"/>
-                </a:solidFill>
-              </a:defRPr>
-            </a:pPr>
-            <a:r>
-              <a:t>• Deleting Route</a:t>
-            </a:r>
-          </a:p>
-          <a:p>
-            <a:pPr>
-              <a:spcAft>
-                <a:spcPts val="800"/>
-              </a:spcAft>
-              <a:defRPr sz="1300">
-                <a:solidFill>
-                  <a:srgbClr val="1E293B"/>
-                </a:solidFill>
-              </a:defRPr>
-            </a:pPr>
-            <a:r>
-              <a:t>   `ip route del 192.168.10.0/24`.</a:t>
-            </a:r>
-          </a:p>
-          <a:p>
-            <a:pPr>
-              <a:spcAft>
-                <a:spcPts val="200"/>
-              </a:spcAft>
-              <a:defRPr b="1" sz="1500">
-                <a:solidFill>
-                  <a:srgbClr val="0F1E4A"/>
-                </a:solidFill>
-              </a:defRPr>
-            </a:pPr>
-            <a:r>
-              <a:t>• Policy Routing (`ip rule`)</a:t>
-            </a:r>
-          </a:p>
-          <a:p>
-            <a:pPr>
-              <a:spcAft>
-                <a:spcPts val="800"/>
-              </a:spcAft>
-              <a:defRPr sz="1300">
-                <a:solidFill>
-                  <a:srgbClr val="1E293B"/>
-                </a:solidFill>
-              </a:defRPr>
-            </a:pPr>
-            <a:r>
-              <a:t>   Multiple routing tables selected by source IP, TOS, or firewall mark (e.g. `ip rule add from 192.168.2.0/24 table 100`).</a:t>
-            </a:r>
-          </a:p>
-        </p:txBody>
-      </p:sp>
-      <p:sp>
-        <p:nvSpPr>
-          <p:cNvPr id="7" name="Rounded Rectangle 6"/>
+              <a:t>M2.3 LINUX IPROUTE2</a:t>
+            </a:r>
+          </a:p>
+        </p:txBody>
+      </p:sp>
+      <p:sp>
+        <p:nvSpPr>
+          <p:cNvPr id="6" name="Rounded Rectangle 5"/>
           <p:cNvSpPr/>
           <p:nvPr/>
         </p:nvSpPr>
         <p:spPr>
           <a:xfrm>
-            <a:off x="7955279" y="1280160"/>
-            <a:ext cx="3566160" cy="4846320"/>
+            <a:off x="731520" y="1234440"/>
+            <a:ext cx="6217920" cy="4892040"/>
           </a:xfrm>
           <a:prstGeom prst="roundRect">
             <a:avLst/>
           </a:prstGeom>
           <a:solidFill>
-            <a:srgbClr val="F1F5F9"/>
+            <a:srgbClr val="0F172A"/>
           </a:solidFill>
           <a:ln w="19050">
             <a:solidFill>
@@ -4202,14 +4203,14 @@
       </p:sp>
       <p:sp>
         <p:nvSpPr>
-          <p:cNvPr id="8" name="TextBox 7"/>
+          <p:cNvPr id="7" name="TextBox 6"/>
           <p:cNvSpPr txBox="1"/>
           <p:nvPr/>
         </p:nvSpPr>
         <p:spPr>
           <a:xfrm>
-            <a:off x="8138160" y="1417320"/>
-            <a:ext cx="3200400" cy="4572000"/>
+            <a:off x="868680" y="1325880"/>
+            <a:ext cx="5943600" cy="4663440"/>
           </a:xfrm>
           <a:prstGeom prst="rect">
             <a:avLst/>
@@ -4224,16 +4225,156 @@
           <a:p>
             <a:pPr>
               <a:spcAft>
-                <a:spcPts val="1000"/>
+                <a:spcPts val="600"/>
               </a:spcAft>
-              <a:defRPr b="1" sz="1500">
-                <a:solidFill>
-                  <a:srgbClr val="0E7490"/>
+              <a:defRPr b="1" sz="1100">
+                <a:solidFill>
+                  <a:srgbClr val="D97706"/>
                 </a:solidFill>
               </a:defRPr>
             </a:pPr>
             <a:r>
-              <a:t>Hands-on Commands</a:t>
+              <a:t>// Linux Socket &amp; Protocol Implementation</a:t>
+            </a:r>
+          </a:p>
+          <a:p>
+            <a:pPr>
+              <a:defRPr sz="1050">
+                <a:solidFill>
+                  <a:srgbClr val="E2E8F0"/>
+                </a:solidFill>
+                <a:latin typeface="Consolas"/>
+              </a:defRPr>
+            </a:pPr>
+            <a:r>
+              <a:t># Linux iproute2 Advanced Routing Commands</a:t>
+            </a:r>
+            <a:br/>
+            <a:br/>
+            <a:r>
+              <a:t># 1. Inspect kernel routing table</a:t>
+            </a:r>
+            <a:br/>
+            <a:r>
+              <a:t>ip route show</a:t>
+            </a:r>
+            <a:br/>
+            <a:br/>
+            <a:r>
+              <a:t># 2. Add static route via gateway</a:t>
+            </a:r>
+            <a:br/>
+            <a:r>
+              <a:t>ip route add 192.168.10.0/24 via 10.0.0.1 dev eth0</a:t>
+            </a:r>
+            <a:br/>
+            <a:br/>
+            <a:r>
+              <a:t># 3. Create Policy-Based Routing (PBR) table</a:t>
+            </a:r>
+            <a:br/>
+            <a:r>
+              <a:t>echo "200 custom_table" &gt;&gt; /etc/iproute2/rt_tables</a:t>
+            </a:r>
+            <a:br/>
+            <a:r>
+              <a:t>ip rule add from 192.168.1.50 table custom_table</a:t>
+            </a:r>
+            <a:br/>
+            <a:r>
+              <a:t>ip route add default via 10.0.0.254 dev eth1 table custom_table</a:t>
+            </a:r>
+            <a:br/>
+            <a:br/>
+            <a:r>
+              <a:t># 4. Flush and inspect route cache</a:t>
+            </a:r>
+            <a:br/>
+            <a:r>
+              <a:t>ip route flush cache</a:t>
+            </a:r>
+          </a:p>
+        </p:txBody>
+      </p:sp>
+      <p:sp>
+        <p:nvSpPr>
+          <p:cNvPr id="8" name="Rounded Rectangle 7"/>
+          <p:cNvSpPr/>
+          <p:nvPr/>
+        </p:nvSpPr>
+        <p:spPr>
+          <a:xfrm>
+            <a:off x="7132320" y="1234440"/>
+            <a:ext cx="4389120" cy="4892040"/>
+          </a:xfrm>
+          <a:prstGeom prst="roundRect">
+            <a:avLst/>
+          </a:prstGeom>
+          <a:solidFill>
+            <a:srgbClr val="F8FAFC"/>
+          </a:solidFill>
+          <a:ln w="19050">
+            <a:solidFill>
+              <a:srgbClr val="0F1E4A"/>
+            </a:solidFill>
+          </a:ln>
+        </p:spPr>
+        <p:style>
+          <a:lnRef idx="1">
+            <a:schemeClr val="accent1"/>
+          </a:lnRef>
+          <a:fillRef idx="3">
+            <a:schemeClr val="accent1"/>
+          </a:fillRef>
+          <a:effectRef idx="2">
+            <a:schemeClr val="accent1"/>
+          </a:effectRef>
+          <a:fontRef idx="minor">
+            <a:schemeClr val="lt1"/>
+          </a:fontRef>
+        </p:style>
+        <p:txBody>
+          <a:bodyPr rtlCol="0" anchor="ctr"/>
+          <a:lstStyle/>
+          <a:p>
+            <a:pPr algn="ctr"/>
+          </a:p>
+        </p:txBody>
+      </p:sp>
+      <p:sp>
+        <p:nvSpPr>
+          <p:cNvPr id="9" name="TextBox 8"/>
+          <p:cNvSpPr txBox="1"/>
+          <p:nvPr/>
+        </p:nvSpPr>
+        <p:spPr>
+          <a:xfrm>
+            <a:off x="7315200" y="1371600"/>
+            <a:ext cx="4023360" cy="4572000"/>
+          </a:xfrm>
+          <a:prstGeom prst="rect">
+            <a:avLst/>
+          </a:prstGeom>
+          <a:noFill/>
+        </p:spPr>
+        <p:txBody>
+          <a:bodyPr wrap="square">
+            <a:spAutoFit/>
+          </a:bodyPr>
+          <a:lstStyle/>
+          <a:p>
+            <a:pPr>
+              <a:spcAft>
+                <a:spcPts val="800"/>
+              </a:spcAft>
+              <a:defRPr b="1" sz="1400">
+                <a:solidFill>
+                  <a:srgbClr val="0F1E4A"/>
+                </a:solidFill>
+              </a:defRPr>
+            </a:pPr>
+            <a:r>
+              <a:t>⚙️ System Call &amp; Execution Workflow</a:t>
             </a:r>
           </a:p>
           <a:p>
@@ -4243,12 +4384,12 @@
               </a:spcAft>
               <a:defRPr sz="1200">
                 <a:solidFill>
-                  <a:srgbClr val="1E293B"/>
+                  <a:srgbClr val="0F172A"/>
                 </a:solidFill>
               </a:defRPr>
             </a:pPr>
             <a:r>
-              <a:t>→ ip route show: View routes</a:t>
+              <a:t>• `ip route` Suite: Replaces deprecated `route` and `ifconfig` tools with direct Netlink socket communication to kernel.</a:t>
             </a:r>
           </a:p>
           <a:p>
@@ -4258,12 +4399,12 @@
               </a:spcAft>
               <a:defRPr sz="1200">
                 <a:solidFill>
-                  <a:srgbClr val="1E293B"/>
+                  <a:srgbClr val="0F172A"/>
                 </a:solidFill>
               </a:defRPr>
             </a:pPr>
             <a:r>
-              <a:t>→ ip route add &lt;net&gt; via &lt;gw&gt; dev &lt;if&gt;</a:t>
+              <a:t>• Custom Routing Tables: Linux supports up to 255 independent routing tables for multi-homing and ISP failover.</a:t>
             </a:r>
           </a:p>
           <a:p>
@@ -4273,12 +4414,12 @@
               </a:spcAft>
               <a:defRPr sz="1200">
                 <a:solidFill>
-                  <a:srgbClr val="1E293B"/>
+                  <a:srgbClr val="0F172A"/>
                 </a:solidFill>
               </a:defRPr>
             </a:pPr>
             <a:r>
-              <a:t>→ ip route del &lt;net&gt;</a:t>
+              <a:t>• `ip rule` Subsystem: Evaluates routing policy database (RPDB) rules sequentially to select appropriate routing table.</a:t>
             </a:r>
           </a:p>
           <a:p>
@@ -4288,12 +4429,479 @@
               </a:spcAft>
               <a:defRPr sz="1200">
                 <a:solidFill>
-                  <a:srgbClr val="1E293B"/>
+                  <a:srgbClr val="0F172A"/>
                 </a:solidFill>
               </a:defRPr>
             </a:pPr>
             <a:r>
-              <a:t>→ ip rule list: Policy routing rules</a:t>
+              <a:t>• Route Cache Behavior: Historical kernels maintained route hash cache; modern kernels use ultra-fast lockless FIB trie lookups.</a:t>
+            </a:r>
+          </a:p>
+          <a:p>
+            <a:pPr>
+              <a:defRPr b="1" sz="1150">
+                <a:solidFill>
+                  <a:srgbClr val="0E7490"/>
+                </a:solidFill>
+              </a:defRPr>
+            </a:pPr>
+            <a:r>
+              <a:t>💡 Hands-on Insight: Kernel `sk_buff` zero-copy architecture allows Linux to process millions of packets per second per CPU core.</a:t>
+            </a:r>
+          </a:p>
+        </p:txBody>
+      </p:sp>
+      <p:sp>
+        <p:nvSpPr>
+          <p:cNvPr id="10" name="TextBox 9"/>
+          <p:cNvSpPr txBox="1"/>
+          <p:nvPr/>
+        </p:nvSpPr>
+        <p:spPr>
+          <a:xfrm>
+            <a:off x="731520" y="6327648"/>
+            <a:ext cx="10789920" cy="320040"/>
+          </a:xfrm>
+          <a:prstGeom prst="rect">
+            <a:avLst/>
+          </a:prstGeom>
+          <a:noFill/>
+        </p:spPr>
+        <p:txBody>
+          <a:bodyPr wrap="none">
+            <a:spAutoFit/>
+          </a:bodyPr>
+          <a:lstStyle/>
+          <a:p>
+            <a:pPr>
+              <a:defRPr sz="950">
+                <a:solidFill>
+                  <a:srgbClr val="64748B"/>
+                </a:solidFill>
+              </a:defRPr>
+            </a:pPr>
+            <a:r>
+              <a:t>PCCST501 Computer Networks | KTU 2024 Scheme | Prof. Anju Markose | Assistant Professor, Dept. of CSE | VJCET</a:t>
+            </a:r>
+          </a:p>
+        </p:txBody>
+      </p:sp>
+      <p:sp>
+        <p:nvSpPr>
+          <p:cNvPr id="11" name="TextBox 10"/>
+          <p:cNvSpPr txBox="1"/>
+          <p:nvPr/>
+        </p:nvSpPr>
+        <p:spPr>
+          <a:xfrm>
+            <a:off x="6858000" y="6327648"/>
+            <a:ext cx="4572000" cy="320040"/>
+          </a:xfrm>
+          <a:prstGeom prst="rect">
+            <a:avLst/>
+          </a:prstGeom>
+          <a:noFill/>
+        </p:spPr>
+        <p:txBody>
+          <a:bodyPr wrap="none">
+            <a:spAutoFit/>
+          </a:bodyPr>
+          <a:lstStyle/>
+          <a:p>
+            <a:pPr algn="r">
+              <a:defRPr sz="950">
+                <a:solidFill>
+                  <a:srgbClr val="64748B"/>
+                </a:solidFill>
+              </a:defRPr>
+            </a:pPr>
+            <a:r>
+              <a:t>Dept. of CSE, VJCET</a:t>
+            </a:r>
+          </a:p>
+        </p:txBody>
+      </p:sp>
+    </p:spTree>
+  </p:cSld>
+  <p:clrMapOvr>
+    <a:masterClrMapping/>
+  </p:clrMapOvr>
+</p:sld>
+</file>
+
+<file path=ppt/slides/slide4.xml><?xml version="1.0" encoding="utf-8"?>
+<p:sld xmlns:a="http://schemas.openxmlformats.org/drawingml/2006/main" xmlns:p="http://schemas.openxmlformats.org/presentationml/2006/main" xmlns:r="http://schemas.openxmlformats.org/officeDocument/2006/relationships">
+  <p:cSld>
+    <p:spTree>
+      <p:nvGrpSpPr>
+        <p:cNvPr id="1" name=""/>
+        <p:cNvGrpSpPr/>
+        <p:nvPr/>
+      </p:nvGrpSpPr>
+      <p:grpSpPr/>
+      <p:sp>
+        <p:nvSpPr>
+          <p:cNvPr id="2" name="Rectangle 1"/>
+          <p:cNvSpPr/>
+          <p:nvPr/>
+        </p:nvSpPr>
+        <p:spPr>
+          <a:xfrm>
+            <a:off x="0" y="0"/>
+            <a:ext cx="12191695" cy="1005840"/>
+          </a:xfrm>
+          <a:prstGeom prst="rect">
+            <a:avLst/>
+          </a:prstGeom>
+          <a:solidFill>
+            <a:srgbClr val="0F1E4A"/>
+          </a:solidFill>
+          <a:ln>
+            <a:noFill/>
+          </a:ln>
+        </p:spPr>
+        <p:style>
+          <a:lnRef idx="1">
+            <a:schemeClr val="accent1"/>
+          </a:lnRef>
+          <a:fillRef idx="3">
+            <a:schemeClr val="accent1"/>
+          </a:fillRef>
+          <a:effectRef idx="2">
+            <a:schemeClr val="accent1"/>
+          </a:effectRef>
+          <a:fontRef idx="minor">
+            <a:schemeClr val="lt1"/>
+          </a:fontRef>
+        </p:style>
+        <p:txBody>
+          <a:bodyPr rtlCol="0" anchor="ctr"/>
+          <a:lstStyle/>
+          <a:p>
+            <a:pPr algn="ctr"/>
+          </a:p>
+        </p:txBody>
+      </p:sp>
+      <p:sp>
+        <p:nvSpPr>
+          <p:cNvPr id="3" name="Rectangle 2"/>
+          <p:cNvSpPr/>
+          <p:nvPr/>
+        </p:nvSpPr>
+        <p:spPr>
+          <a:xfrm>
+            <a:off x="0" y="969264"/>
+            <a:ext cx="12191695" cy="36576"/>
+          </a:xfrm>
+          <a:prstGeom prst="rect">
+            <a:avLst/>
+          </a:prstGeom>
+          <a:solidFill>
+            <a:srgbClr val="D97706"/>
+          </a:solidFill>
+          <a:ln>
+            <a:noFill/>
+          </a:ln>
+        </p:spPr>
+        <p:style>
+          <a:lnRef idx="1">
+            <a:schemeClr val="accent1"/>
+          </a:lnRef>
+          <a:fillRef idx="3">
+            <a:schemeClr val="accent1"/>
+          </a:fillRef>
+          <a:effectRef idx="2">
+            <a:schemeClr val="accent1"/>
+          </a:effectRef>
+          <a:fontRef idx="minor">
+            <a:schemeClr val="lt1"/>
+          </a:fontRef>
+        </p:style>
+        <p:txBody>
+          <a:bodyPr rtlCol="0" anchor="ctr"/>
+          <a:lstStyle/>
+          <a:p>
+            <a:pPr algn="ctr"/>
+          </a:p>
+        </p:txBody>
+      </p:sp>
+      <p:sp>
+        <p:nvSpPr>
+          <p:cNvPr id="4" name="TextBox 3"/>
+          <p:cNvSpPr txBox="1"/>
+          <p:nvPr/>
+        </p:nvSpPr>
+        <p:spPr>
+          <a:xfrm>
+            <a:off x="731520" y="164592"/>
+            <a:ext cx="8412480" cy="685800"/>
+          </a:xfrm>
+          <a:prstGeom prst="rect">
+            <a:avLst/>
+          </a:prstGeom>
+          <a:noFill/>
+        </p:spPr>
+        <p:txBody>
+          <a:bodyPr wrap="none">
+            <a:spAutoFit/>
+          </a:bodyPr>
+          <a:lstStyle/>
+          <a:p>
+            <a:pPr>
+              <a:defRPr b="1" sz="2100">
+                <a:solidFill>
+                  <a:srgbClr val="F8FAFC"/>
+                </a:solidFill>
+              </a:defRPr>
+            </a:pPr>
+            <a:r>
+              <a:t>🎯 Exam Booster &amp; Review: Linux Kernel Routing Stack</a:t>
+            </a:r>
+          </a:p>
+        </p:txBody>
+      </p:sp>
+      <p:sp>
+        <p:nvSpPr>
+          <p:cNvPr id="5" name="TextBox 4"/>
+          <p:cNvSpPr txBox="1"/>
+          <p:nvPr/>
+        </p:nvSpPr>
+        <p:spPr>
+          <a:xfrm>
+            <a:off x="8229600" y="164592"/>
+            <a:ext cx="3291840" cy="685800"/>
+          </a:xfrm>
+          <a:prstGeom prst="rect">
+            <a:avLst/>
+          </a:prstGeom>
+          <a:noFill/>
+        </p:spPr>
+        <p:txBody>
+          <a:bodyPr wrap="none">
+            <a:spAutoFit/>
+          </a:bodyPr>
+          <a:lstStyle/>
+          <a:p>
+            <a:pPr algn="r">
+              <a:defRPr b="1" sz="1300">
+                <a:solidFill>
+                  <a:srgbClr val="D97706"/>
+                </a:solidFill>
+              </a:defRPr>
+            </a:pPr>
+            <a:r>
+              <a:t>M2.3</a:t>
+            </a:r>
+          </a:p>
+        </p:txBody>
+      </p:sp>
+      <p:sp>
+        <p:nvSpPr>
+          <p:cNvPr id="6" name="Rounded Rectangle 5"/>
+          <p:cNvSpPr/>
+          <p:nvPr/>
+        </p:nvSpPr>
+        <p:spPr>
+          <a:xfrm>
+            <a:off x="731520" y="1234440"/>
+            <a:ext cx="5303520" cy="4892040"/>
+          </a:xfrm>
+          <a:prstGeom prst="roundRect">
+            <a:avLst/>
+          </a:prstGeom>
+          <a:solidFill>
+            <a:srgbClr val="FEF3C7"/>
+          </a:solidFill>
+          <a:ln w="19050">
+            <a:solidFill>
+              <a:srgbClr val="D97706"/>
+            </a:solidFill>
+          </a:ln>
+        </p:spPr>
+        <p:style>
+          <a:lnRef idx="1">
+            <a:schemeClr val="accent1"/>
+          </a:lnRef>
+          <a:fillRef idx="3">
+            <a:schemeClr val="accent1"/>
+          </a:fillRef>
+          <a:effectRef idx="2">
+            <a:schemeClr val="accent1"/>
+          </a:effectRef>
+          <a:fontRef idx="minor">
+            <a:schemeClr val="lt1"/>
+          </a:fontRef>
+        </p:style>
+        <p:txBody>
+          <a:bodyPr rtlCol="0" anchor="ctr"/>
+          <a:lstStyle/>
+          <a:p>
+            <a:pPr algn="ctr"/>
+          </a:p>
+        </p:txBody>
+      </p:sp>
+      <p:sp>
+        <p:nvSpPr>
+          <p:cNvPr id="7" name="TextBox 6"/>
+          <p:cNvSpPr txBox="1"/>
+          <p:nvPr/>
+        </p:nvSpPr>
+        <p:spPr>
+          <a:xfrm>
+            <a:off x="914400" y="1371600"/>
+            <a:ext cx="4937760" cy="4572000"/>
+          </a:xfrm>
+          <a:prstGeom prst="rect">
+            <a:avLst/>
+          </a:prstGeom>
+          <a:noFill/>
+        </p:spPr>
+        <p:txBody>
+          <a:bodyPr wrap="square">
+            <a:spAutoFit/>
+          </a:bodyPr>
+          <a:lstStyle/>
+          <a:p>
+            <a:pPr>
+              <a:spcAft>
+                <a:spcPts val="1000"/>
+              </a:spcAft>
+              <a:defRPr b="1" sz="1450">
+                <a:solidFill>
+                  <a:srgbClr val="D97706"/>
+                </a:solidFill>
+              </a:defRPr>
+            </a:pPr>
+            <a:r>
+              <a:t>📚 KTU High-Yield Questions (K3 Apply)</a:t>
+            </a:r>
+          </a:p>
+          <a:p>
+            <a:pPr>
+              <a:spcAft>
+                <a:spcPts val="700"/>
+              </a:spcAft>
+              <a:defRPr sz="1200">
+                <a:solidFill>
+                  <a:srgbClr val="0F172A"/>
+                </a:solidFill>
+              </a:defRPr>
+            </a:pPr>
+            <a:r>
+              <a:t>Q: Explain the architecture and role of the `sk_buff` data structure in Linux packet processing. (7 Marks)</a:t>
+            </a:r>
+          </a:p>
+          <a:p>
+            <a:pPr>
+              <a:spcAft>
+                <a:spcPts val="700"/>
+              </a:spcAft>
+              <a:defRPr sz="1200">
+                <a:solidFill>
+                  <a:srgbClr val="0F172A"/>
+                </a:solidFill>
+              </a:defRPr>
+            </a:pPr>
+            <a:r>
+              <a:t>Q: Trace the step-by-step path of an incoming packet from physical NIC reception to application socket delivery in the Linux kernel. (8 Marks)</a:t>
+            </a:r>
+          </a:p>
+          <a:p>
+            <a:pPr>
+              <a:spcAft>
+                <a:spcPts val="700"/>
+              </a:spcAft>
+              <a:defRPr sz="1200">
+                <a:solidFill>
+                  <a:srgbClr val="0F172A"/>
+                </a:solidFill>
+              </a:defRPr>
+            </a:pPr>
+            <a:r>
+              <a:t>Q: Demonstrate Policy-Based Routing (PBR) in Linux using `ip rule` and `ip route` commands. (6 Marks)</a:t>
+            </a:r>
+          </a:p>
+        </p:txBody>
+      </p:sp>
+      <p:sp>
+        <p:nvSpPr>
+          <p:cNvPr id="8" name="Rounded Rectangle 7"/>
+          <p:cNvSpPr/>
+          <p:nvPr/>
+        </p:nvSpPr>
+        <p:spPr>
+          <a:xfrm>
+            <a:off x="6309360" y="1234440"/>
+            <a:ext cx="5212080" cy="4892040"/>
+          </a:xfrm>
+          <a:prstGeom prst="roundRect">
+            <a:avLst/>
+          </a:prstGeom>
+          <a:solidFill>
+            <a:srgbClr val="EEF2FF"/>
+          </a:solidFill>
+          <a:ln w="19050">
+            <a:solidFill>
+              <a:srgbClr val="0E7490"/>
+            </a:solidFill>
+          </a:ln>
+        </p:spPr>
+        <p:style>
+          <a:lnRef idx="1">
+            <a:schemeClr val="accent1"/>
+          </a:lnRef>
+          <a:fillRef idx="3">
+            <a:schemeClr val="accent1"/>
+          </a:fillRef>
+          <a:effectRef idx="2">
+            <a:schemeClr val="accent1"/>
+          </a:effectRef>
+          <a:fontRef idx="minor">
+            <a:schemeClr val="lt1"/>
+          </a:fontRef>
+        </p:style>
+        <p:txBody>
+          <a:bodyPr rtlCol="0" anchor="ctr"/>
+          <a:lstStyle/>
+          <a:p>
+            <a:pPr algn="ctr"/>
+          </a:p>
+        </p:txBody>
+      </p:sp>
+      <p:sp>
+        <p:nvSpPr>
+          <p:cNvPr id="9" name="TextBox 8"/>
+          <p:cNvSpPr txBox="1"/>
+          <p:nvPr/>
+        </p:nvSpPr>
+        <p:spPr>
+          <a:xfrm>
+            <a:off x="6492240" y="1371600"/>
+            <a:ext cx="4846320" cy="4572000"/>
+          </a:xfrm>
+          <a:prstGeom prst="rect">
+            <a:avLst/>
+          </a:prstGeom>
+          <a:noFill/>
+        </p:spPr>
+        <p:txBody>
+          <a:bodyPr wrap="square">
+            <a:spAutoFit/>
+          </a:bodyPr>
+          <a:lstStyle/>
+          <a:p>
+            <a:pPr>
+              <a:spcAft>
+                <a:spcPts val="1000"/>
+              </a:spcAft>
+              <a:defRPr b="1" sz="1450">
+                <a:solidFill>
+                  <a:srgbClr val="0E7490"/>
+                </a:solidFill>
+              </a:defRPr>
+            </a:pPr>
+            <a:r>
+              <a:t>💡 Critical Conceptual Takeaways</a:t>
             </a:r>
           </a:p>
           <a:p>
@@ -4303,26 +4911,56 @@
               </a:spcAft>
               <a:defRPr sz="1200">
                 <a:solidFill>
-                  <a:srgbClr val="1E293B"/>
+                  <a:srgbClr val="0F172A"/>
                 </a:solidFill>
               </a:defRPr>
             </a:pPr>
             <a:r>
-              <a:t>→ All KTU CO2 &amp; CO3 Topics Covered</a:t>
-            </a:r>
-          </a:p>
-        </p:txBody>
-      </p:sp>
-      <p:sp>
-        <p:nvSpPr>
-          <p:cNvPr id="9" name="TextBox 8"/>
+              <a:t>✔ `sk_buff` avoids costly memory copies across protocol layers using internal buffer pointers.</a:t>
+            </a:r>
+          </a:p>
+          <a:p>
+            <a:pPr>
+              <a:spcAft>
+                <a:spcPts val="600"/>
+              </a:spcAft>
+              <a:defRPr sz="1200">
+                <a:solidFill>
+                  <a:srgbClr val="0F172A"/>
+                </a:solidFill>
+              </a:defRPr>
+            </a:pPr>
+            <a:r>
+              <a:t>✔ NAPI SoftIRQs prevent interrupt livelock during heavy packet bursts.</a:t>
+            </a:r>
+          </a:p>
+          <a:p>
+            <a:pPr>
+              <a:spcAft>
+                <a:spcPts val="600"/>
+              </a:spcAft>
+              <a:defRPr sz="1200">
+                <a:solidFill>
+                  <a:srgbClr val="0F172A"/>
+                </a:solidFill>
+              </a:defRPr>
+            </a:pPr>
+            <a:r>
+              <a:t>✔ FIB LC-trie enables sub-microsecond Longest Prefix Matching across hundreds of thousands of BGP routes.</a:t>
+            </a:r>
+          </a:p>
+        </p:txBody>
+      </p:sp>
+      <p:sp>
+        <p:nvSpPr>
+          <p:cNvPr id="10" name="TextBox 9"/>
           <p:cNvSpPr txBox="1"/>
           <p:nvPr/>
         </p:nvSpPr>
         <p:spPr>
           <a:xfrm>
-            <a:off x="731520" y="6309360"/>
-            <a:ext cx="10789920" cy="365760"/>
+            <a:off x="731520" y="6327648"/>
+            <a:ext cx="10789920" cy="320040"/>
           </a:xfrm>
           <a:prstGeom prst="rect">
             <a:avLst/>
@@ -4344,6 +4982,41 @@
             </a:pPr>
             <a:r>
               <a:t>PCCST501 Computer Networks | KTU 2024 Scheme | Prof. Anju Markose | Assistant Professor, Dept. of CSE | VJCET</a:t>
+            </a:r>
+          </a:p>
+        </p:txBody>
+      </p:sp>
+      <p:sp>
+        <p:nvSpPr>
+          <p:cNvPr id="11" name="TextBox 10"/>
+          <p:cNvSpPr txBox="1"/>
+          <p:nvPr/>
+        </p:nvSpPr>
+        <p:spPr>
+          <a:xfrm>
+            <a:off x="6858000" y="6327648"/>
+            <a:ext cx="4572000" cy="320040"/>
+          </a:xfrm>
+          <a:prstGeom prst="rect">
+            <a:avLst/>
+          </a:prstGeom>
+          <a:noFill/>
+        </p:spPr>
+        <p:txBody>
+          <a:bodyPr wrap="none">
+            <a:spAutoFit/>
+          </a:bodyPr>
+          <a:lstStyle/>
+          <a:p>
+            <a:pPr algn="r">
+              <a:defRPr sz="950">
+                <a:solidFill>
+                  <a:srgbClr val="64748B"/>
+                </a:solidFill>
+              </a:defRPr>
+            </a:pPr>
+            <a:r>
+              <a:t>Dept. of CSE, VJCET</a:t>
             </a:r>
           </a:p>
         </p:txBody>
